--- a/reports/pitch_regional_630pm.pptx
+++ b/reports/pitch_regional_630pm.pptx
@@ -15,6 +15,7 @@
     <p:sldId id="263" r:id="rId14"/>
     <p:sldId id="264" r:id="rId15"/>
     <p:sldId id="265" r:id="rId16"/>
+    <p:sldId id="266" r:id="rId17"/>
   </p:sldIdLst>
   <p:sldSz cx="12191695" cy="6858000" type="screen4x3"/>
   <p:notesSz cx="6858000" cy="9144000"/>
@@ -4151,7 +4152,7 @@
               </a:defRPr>
             </a:pPr>
             <a:r>
-              <a:t>Thank you  —  Q&amp;A</a:t>
+              <a:t>Final finding  —  three layers of regional truth</a:t>
             </a:r>
           </a:p>
         </p:txBody>
@@ -4186,7 +4187,7 @@
               </a:defRPr>
             </a:pPr>
             <a:r>
-              <a:t>Repo, tag, headline numbers.</a:t>
+              <a:t>Behaviour is uniform. Structure differs. Geography is decisive.</a:t>
             </a:r>
           </a:p>
         </p:txBody>
@@ -4312,8 +4313,308 @@
         </p:nvSpPr>
         <p:spPr>
           <a:xfrm>
-            <a:off x="914400" y="1554480"/>
-            <a:ext cx="10332720" cy="1188720"/>
+            <a:off x="365760" y="1280160"/>
+            <a:ext cx="3794760" cy="4937760"/>
+          </a:xfrm>
+          <a:prstGeom prst="rect">
+            <a:avLst/>
+          </a:prstGeom>
+          <a:solidFill>
+            <a:srgbClr val="12304A"/>
+          </a:solidFill>
+          <a:ln w="12700">
+            <a:solidFill>
+              <a:srgbClr val="94A3B8"/>
+            </a:solidFill>
+          </a:ln>
+        </p:spPr>
+        <p:style>
+          <a:lnRef idx="1">
+            <a:schemeClr val="accent1"/>
+          </a:lnRef>
+          <a:fillRef idx="3">
+            <a:schemeClr val="accent1"/>
+          </a:fillRef>
+          <a:effectRef idx="2">
+            <a:schemeClr val="accent1"/>
+          </a:effectRef>
+          <a:fontRef idx="minor">
+            <a:schemeClr val="lt1"/>
+          </a:fontRef>
+        </p:style>
+        <p:txBody>
+          <a:bodyPr rtlCol="0" anchor="ctr"/>
+          <a:lstStyle/>
+          <a:p>
+            <a:pPr algn="ctr"/>
+          </a:p>
+        </p:txBody>
+      </p:sp>
+      <p:sp>
+        <p:nvSpPr>
+          <p:cNvPr id="11" name="TextBox 10"/>
+          <p:cNvSpPr txBox="1"/>
+          <p:nvPr/>
+        </p:nvSpPr>
+        <p:spPr>
+          <a:xfrm>
+            <a:off x="502920" y="1371600"/>
+            <a:ext cx="3520440" cy="274320"/>
+          </a:xfrm>
+          <a:prstGeom prst="rect">
+            <a:avLst/>
+          </a:prstGeom>
+          <a:noFill/>
+        </p:spPr>
+        <p:txBody>
+          <a:bodyPr wrap="square">
+            <a:spAutoFit/>
+          </a:bodyPr>
+          <a:lstStyle/>
+          <a:p>
+            <a:pPr algn="l">
+              <a:defRPr sz="1100" b="1" i="0">
+                <a:solidFill>
+                  <a:srgbClr val="94A3B8"/>
+                </a:solidFill>
+              </a:defRPr>
+            </a:pPr>
+            <a:r>
+              <a:t>LAYER 1  ·  BEHAVIOUR</a:t>
+            </a:r>
+          </a:p>
+        </p:txBody>
+      </p:sp>
+      <p:sp>
+        <p:nvSpPr>
+          <p:cNvPr id="12" name="TextBox 11"/>
+          <p:cNvSpPr txBox="1"/>
+          <p:nvPr/>
+        </p:nvSpPr>
+        <p:spPr>
+          <a:xfrm>
+            <a:off x="502920" y="1691640"/>
+            <a:ext cx="3520440" cy="457200"/>
+          </a:xfrm>
+          <a:prstGeom prst="rect">
+            <a:avLst/>
+          </a:prstGeom>
+          <a:noFill/>
+        </p:spPr>
+        <p:txBody>
+          <a:bodyPr wrap="square">
+            <a:spAutoFit/>
+          </a:bodyPr>
+          <a:lstStyle/>
+          <a:p>
+            <a:pPr algn="l">
+              <a:defRPr sz="2000" b="1" i="0">
+                <a:solidFill>
+                  <a:srgbClr val="FFFFFF"/>
+                </a:solidFill>
+              </a:defRPr>
+            </a:pPr>
+            <a:r>
+              <a:t>AUC ≈ 0.51</a:t>
+            </a:r>
+          </a:p>
+        </p:txBody>
+      </p:sp>
+      <p:sp>
+        <p:nvSpPr>
+          <p:cNvPr id="13" name="TextBox 12"/>
+          <p:cNvSpPr txBox="1"/>
+          <p:nvPr/>
+        </p:nvSpPr>
+        <p:spPr>
+          <a:xfrm>
+            <a:off x="502920" y="2286000"/>
+            <a:ext cx="3520440" cy="3840480"/>
+          </a:xfrm>
+          <a:prstGeom prst="rect">
+            <a:avLst/>
+          </a:prstGeom>
+          <a:noFill/>
+        </p:spPr>
+        <p:txBody>
+          <a:bodyPr wrap="square">
+            <a:spAutoFit/>
+          </a:bodyPr>
+          <a:lstStyle/>
+          <a:p>
+            <a:pPr algn="l">
+              <a:defRPr sz="1100" b="0" i="0">
+                <a:solidFill>
+                  <a:srgbClr val="FFFFFF"/>
+                </a:solidFill>
+              </a:defRPr>
+            </a:pPr>
+            <a:r>
+              <a:t>Zomato deliveries are operationally IDENTICAL North vs South. 11 univariate tests all p &gt; 0.05; six stress tests including CatBoost, interactions, GroupKFold confirm random-level AUC. Riders, customers, traffic, weather, festivals — all behave the same.</a:t>
+            </a:r>
+          </a:p>
+        </p:txBody>
+      </p:sp>
+      <p:sp>
+        <p:nvSpPr>
+          <p:cNvPr id="14" name="Rectangle 13"/>
+          <p:cNvSpPr/>
+          <p:nvPr/>
+        </p:nvSpPr>
+        <p:spPr>
+          <a:xfrm>
+            <a:off x="4297680" y="1280160"/>
+            <a:ext cx="3794760" cy="4937760"/>
+          </a:xfrm>
+          <a:prstGeom prst="rect">
+            <a:avLst/>
+          </a:prstGeom>
+          <a:solidFill>
+            <a:srgbClr val="12304A"/>
+          </a:solidFill>
+          <a:ln w="12700">
+            <a:solidFill>
+              <a:srgbClr val="FACC15"/>
+            </a:solidFill>
+          </a:ln>
+        </p:spPr>
+        <p:style>
+          <a:lnRef idx="1">
+            <a:schemeClr val="accent1"/>
+          </a:lnRef>
+          <a:fillRef idx="3">
+            <a:schemeClr val="accent1"/>
+          </a:fillRef>
+          <a:effectRef idx="2">
+            <a:schemeClr val="accent1"/>
+          </a:effectRef>
+          <a:fontRef idx="minor">
+            <a:schemeClr val="lt1"/>
+          </a:fontRef>
+        </p:style>
+        <p:txBody>
+          <a:bodyPr rtlCol="0" anchor="ctr"/>
+          <a:lstStyle/>
+          <a:p>
+            <a:pPr algn="ctr"/>
+          </a:p>
+        </p:txBody>
+      </p:sp>
+      <p:sp>
+        <p:nvSpPr>
+          <p:cNvPr id="15" name="TextBox 14"/>
+          <p:cNvSpPr txBox="1"/>
+          <p:nvPr/>
+        </p:nvSpPr>
+        <p:spPr>
+          <a:xfrm>
+            <a:off x="4434840" y="1371600"/>
+            <a:ext cx="3520440" cy="274320"/>
+          </a:xfrm>
+          <a:prstGeom prst="rect">
+            <a:avLst/>
+          </a:prstGeom>
+          <a:noFill/>
+        </p:spPr>
+        <p:txBody>
+          <a:bodyPr wrap="square">
+            <a:spAutoFit/>
+          </a:bodyPr>
+          <a:lstStyle/>
+          <a:p>
+            <a:pPr algn="l">
+              <a:defRPr sz="1100" b="1" i="0">
+                <a:solidFill>
+                  <a:srgbClr val="FACC15"/>
+                </a:solidFill>
+              </a:defRPr>
+            </a:pPr>
+            <a:r>
+              <a:t>LAYER 2  ·  STRUCTURE</a:t>
+            </a:r>
+          </a:p>
+        </p:txBody>
+      </p:sp>
+      <p:sp>
+        <p:nvSpPr>
+          <p:cNvPr id="16" name="TextBox 15"/>
+          <p:cNvSpPr txBox="1"/>
+          <p:nvPr/>
+        </p:nvSpPr>
+        <p:spPr>
+          <a:xfrm>
+            <a:off x="4434840" y="1691640"/>
+            <a:ext cx="3520440" cy="457200"/>
+          </a:xfrm>
+          <a:prstGeom prst="rect">
+            <a:avLst/>
+          </a:prstGeom>
+          <a:noFill/>
+        </p:spPr>
+        <p:txBody>
+          <a:bodyPr wrap="square">
+            <a:spAutoFit/>
+          </a:bodyPr>
+          <a:lstStyle/>
+          <a:p>
+            <a:pPr algn="l">
+              <a:defRPr sz="2000" b="1" i="0">
+                <a:solidFill>
+                  <a:srgbClr val="FFFFFF"/>
+                </a:solidFill>
+              </a:defRPr>
+            </a:pPr>
+            <a:r>
+              <a:t>AUC ≈ 0.91</a:t>
+            </a:r>
+          </a:p>
+        </p:txBody>
+      </p:sp>
+      <p:sp>
+        <p:nvSpPr>
+          <p:cNvPr id="17" name="TextBox 16"/>
+          <p:cNvSpPr txBox="1"/>
+          <p:nvPr/>
+        </p:nvSpPr>
+        <p:spPr>
+          <a:xfrm>
+            <a:off x="4434840" y="2286000"/>
+            <a:ext cx="3520440" cy="3840480"/>
+          </a:xfrm>
+          <a:prstGeom prst="rect">
+            <a:avLst/>
+          </a:prstGeom>
+          <a:noFill/>
+        </p:spPr>
+        <p:txBody>
+          <a:bodyPr wrap="square">
+            <a:spAutoFit/>
+          </a:bodyPr>
+          <a:lstStyle/>
+          <a:p>
+            <a:pPr algn="l">
+              <a:defRPr sz="1100" b="0" i="0">
+                <a:solidFill>
+                  <a:srgbClr val="FFFFFF"/>
+                </a:solidFill>
+              </a:defRPr>
+            </a:pPr>
+            <a:r>
+              <a:t>Haversine delivery-distance distributions DIFFER between South and North cities (KS D=0.088, p≪10⁻⁶⁰), even with medians equal. This is geometric — South cities have different restaurant-customer layouts. Survives leave-cities-out validation.</a:t>
+            </a:r>
+          </a:p>
+        </p:txBody>
+      </p:sp>
+      <p:sp>
+        <p:nvSpPr>
+          <p:cNvPr id="18" name="Rectangle 17"/>
+          <p:cNvSpPr/>
+          <p:nvPr/>
+        </p:nvSpPr>
+        <p:spPr>
+          <a:xfrm>
+            <a:off x="8229600" y="1280160"/>
+            <a:ext cx="3657600" cy="4937760"/>
           </a:xfrm>
           <a:prstGeom prst="rect">
             <a:avLst/>
@@ -4351,28 +4652,508 @@
       </p:sp>
       <p:sp>
         <p:nvSpPr>
+          <p:cNvPr id="19" name="TextBox 18"/>
+          <p:cNvSpPr txBox="1"/>
+          <p:nvPr/>
+        </p:nvSpPr>
+        <p:spPr>
+          <a:xfrm>
+            <a:off x="8366760" y="1371600"/>
+            <a:ext cx="3383280" cy="274320"/>
+          </a:xfrm>
+          <a:prstGeom prst="rect">
+            <a:avLst/>
+          </a:prstGeom>
+          <a:noFill/>
+        </p:spPr>
+        <p:txBody>
+          <a:bodyPr wrap="square">
+            <a:spAutoFit/>
+          </a:bodyPr>
+          <a:lstStyle/>
+          <a:p>
+            <a:pPr algn="l">
+              <a:defRPr sz="1100" b="1" i="0">
+                <a:solidFill>
+                  <a:srgbClr val="2DD4BF"/>
+                </a:solidFill>
+              </a:defRPr>
+            </a:pPr>
+            <a:r>
+              <a:t>LAYER 3  ·  GEOGRAPHY</a:t>
+            </a:r>
+          </a:p>
+        </p:txBody>
+      </p:sp>
+      <p:sp>
+        <p:nvSpPr>
+          <p:cNvPr id="20" name="TextBox 19"/>
+          <p:cNvSpPr txBox="1"/>
+          <p:nvPr/>
+        </p:nvSpPr>
+        <p:spPr>
+          <a:xfrm>
+            <a:off x="8366760" y="1691640"/>
+            <a:ext cx="3383280" cy="457200"/>
+          </a:xfrm>
+          <a:prstGeom prst="rect">
+            <a:avLst/>
+          </a:prstGeom>
+          <a:noFill/>
+        </p:spPr>
+        <p:txBody>
+          <a:bodyPr wrap="square">
+            <a:spAutoFit/>
+          </a:bodyPr>
+          <a:lstStyle/>
+          <a:p>
+            <a:pPr algn="l">
+              <a:defRPr sz="2000" b="1" i="0">
+                <a:solidFill>
+                  <a:srgbClr val="FFFFFF"/>
+                </a:solidFill>
+              </a:defRPr>
+            </a:pPr>
+            <a:r>
+              <a:t>AUC = 1.000</a:t>
+            </a:r>
+          </a:p>
+        </p:txBody>
+      </p:sp>
+      <p:sp>
+        <p:nvSpPr>
+          <p:cNvPr id="21" name="TextBox 20"/>
+          <p:cNvSpPr txBox="1"/>
+          <p:nvPr/>
+        </p:nvSpPr>
+        <p:spPr>
+          <a:xfrm>
+            <a:off x="8366760" y="2286000"/>
+            <a:ext cx="3383280" cy="3840480"/>
+          </a:xfrm>
+          <a:prstGeom prst="rect">
+            <a:avLst/>
+          </a:prstGeom>
+          <a:noFill/>
+        </p:spPr>
+        <p:txBody>
+          <a:bodyPr wrap="square">
+            <a:spAutoFit/>
+          </a:bodyPr>
+          <a:lstStyle/>
+          <a:p>
+            <a:pPr algn="l">
+              <a:defRPr sz="1100" b="0" i="0">
+                <a:solidFill>
+                  <a:srgbClr val="FFFFFF"/>
+                </a:solidFill>
+              </a:defRPr>
+            </a:pPr>
+            <a:r>
+              <a:t>Raw lat/lon trivially separates regions — labels are perfectly clean. This is by construction and not a finding, but proves the label vector is correct so judges can trust the other two layers.</a:t>
+            </a:r>
+          </a:p>
+        </p:txBody>
+      </p:sp>
+    </p:spTree>
+  </p:cSld>
+  <p:clrMapOvr>
+    <a:masterClrMapping/>
+  </p:clrMapOvr>
+</p:sld>
+</file>
+
+<file path=ppt/slides/slide11.xml><?xml version="1.0" encoding="utf-8"?>
+<p:sld xmlns:a="http://schemas.openxmlformats.org/drawingml/2006/main" xmlns:p="http://schemas.openxmlformats.org/presentationml/2006/main" xmlns:r="http://schemas.openxmlformats.org/officeDocument/2006/relationships">
+  <p:cSld>
+    <p:spTree>
+      <p:nvGrpSpPr>
+        <p:cNvPr id="1" name=""/>
+        <p:cNvGrpSpPr/>
+        <p:nvPr/>
+      </p:nvGrpSpPr>
+      <p:grpSpPr/>
+      <p:sp>
+        <p:nvSpPr>
+          <p:cNvPr id="2" name="Rectangle 1"/>
+          <p:cNvSpPr/>
+          <p:nvPr/>
+        </p:nvSpPr>
+        <p:spPr>
+          <a:xfrm>
+            <a:off x="0" y="0"/>
+            <a:ext cx="12191695" cy="6858000"/>
+          </a:xfrm>
+          <a:prstGeom prst="rect">
+            <a:avLst/>
+          </a:prstGeom>
+          <a:solidFill>
+            <a:srgbClr val="0A1F33"/>
+          </a:solidFill>
+          <a:ln>
+            <a:noFill/>
+          </a:ln>
+        </p:spPr>
+        <p:style>
+          <a:lnRef idx="1">
+            <a:schemeClr val="accent1"/>
+          </a:lnRef>
+          <a:fillRef idx="3">
+            <a:schemeClr val="accent1"/>
+          </a:fillRef>
+          <a:effectRef idx="2">
+            <a:schemeClr val="accent1"/>
+          </a:effectRef>
+          <a:fontRef idx="minor">
+            <a:schemeClr val="lt1"/>
+          </a:fontRef>
+        </p:style>
+        <p:txBody>
+          <a:bodyPr rtlCol="0" anchor="ctr"/>
+          <a:lstStyle/>
+          <a:p>
+            <a:pPr algn="ctr"/>
+          </a:p>
+        </p:txBody>
+      </p:sp>
+      <p:sp>
+        <p:nvSpPr>
+          <p:cNvPr id="3" name="Rectangle 2"/>
+          <p:cNvSpPr/>
+          <p:nvPr/>
+        </p:nvSpPr>
+        <p:spPr>
+          <a:xfrm>
+            <a:off x="0" y="0"/>
+            <a:ext cx="12191695" cy="73152"/>
+          </a:xfrm>
+          <a:prstGeom prst="rect">
+            <a:avLst/>
+          </a:prstGeom>
+          <a:solidFill>
+            <a:srgbClr val="2DD4BF"/>
+          </a:solidFill>
+          <a:ln>
+            <a:noFill/>
+          </a:ln>
+        </p:spPr>
+        <p:style>
+          <a:lnRef idx="1">
+            <a:schemeClr val="accent1"/>
+          </a:lnRef>
+          <a:fillRef idx="3">
+            <a:schemeClr val="accent1"/>
+          </a:fillRef>
+          <a:effectRef idx="2">
+            <a:schemeClr val="accent1"/>
+          </a:effectRef>
+          <a:fontRef idx="minor">
+            <a:schemeClr val="lt1"/>
+          </a:fontRef>
+        </p:style>
+        <p:txBody>
+          <a:bodyPr rtlCol="0" anchor="ctr"/>
+          <a:lstStyle/>
+          <a:p>
+            <a:pPr algn="ctr"/>
+          </a:p>
+        </p:txBody>
+      </p:sp>
+      <p:sp>
+        <p:nvSpPr>
+          <p:cNvPr id="4" name="Rectangle 3"/>
+          <p:cNvSpPr/>
+          <p:nvPr/>
+        </p:nvSpPr>
+        <p:spPr>
+          <a:xfrm>
+            <a:off x="0" y="73152"/>
+            <a:ext cx="54864" cy="6784848"/>
+          </a:xfrm>
+          <a:prstGeom prst="rect">
+            <a:avLst/>
+          </a:prstGeom>
+          <a:solidFill>
+            <a:srgbClr val="0D9488"/>
+          </a:solidFill>
+          <a:ln>
+            <a:noFill/>
+          </a:ln>
+        </p:spPr>
+        <p:style>
+          <a:lnRef idx="1">
+            <a:schemeClr val="accent1"/>
+          </a:lnRef>
+          <a:fillRef idx="3">
+            <a:schemeClr val="accent1"/>
+          </a:fillRef>
+          <a:effectRef idx="2">
+            <a:schemeClr val="accent1"/>
+          </a:effectRef>
+          <a:fontRef idx="minor">
+            <a:schemeClr val="lt1"/>
+          </a:fontRef>
+        </p:style>
+        <p:txBody>
+          <a:bodyPr rtlCol="0" anchor="ctr"/>
+          <a:lstStyle/>
+          <a:p>
+            <a:pPr algn="ctr"/>
+          </a:p>
+        </p:txBody>
+      </p:sp>
+      <p:sp>
+        <p:nvSpPr>
+          <p:cNvPr id="5" name="TextBox 4"/>
+          <p:cNvSpPr txBox="1"/>
+          <p:nvPr/>
+        </p:nvSpPr>
+        <p:spPr>
+          <a:xfrm>
+            <a:off x="502920" y="256032"/>
+            <a:ext cx="10515600" cy="548640"/>
+          </a:xfrm>
+          <a:prstGeom prst="rect">
+            <a:avLst/>
+          </a:prstGeom>
+          <a:noFill/>
+        </p:spPr>
+        <p:txBody>
+          <a:bodyPr wrap="square">
+            <a:spAutoFit/>
+          </a:bodyPr>
+          <a:lstStyle/>
+          <a:p>
+            <a:pPr algn="l">
+              <a:defRPr sz="2600" b="1" i="0">
+                <a:solidFill>
+                  <a:srgbClr val="FFFFFF"/>
+                </a:solidFill>
+              </a:defRPr>
+            </a:pPr>
+            <a:r>
+              <a:t>Thank you  —  Q&amp;A</a:t>
+            </a:r>
+          </a:p>
+        </p:txBody>
+      </p:sp>
+      <p:sp>
+        <p:nvSpPr>
+          <p:cNvPr id="6" name="TextBox 5"/>
+          <p:cNvSpPr txBox="1"/>
+          <p:nvPr/>
+        </p:nvSpPr>
+        <p:spPr>
+          <a:xfrm>
+            <a:off x="502920" y="777240"/>
+            <a:ext cx="10515600" cy="320040"/>
+          </a:xfrm>
+          <a:prstGeom prst="rect">
+            <a:avLst/>
+          </a:prstGeom>
+          <a:noFill/>
+        </p:spPr>
+        <p:txBody>
+          <a:bodyPr wrap="square">
+            <a:spAutoFit/>
+          </a:bodyPr>
+          <a:lstStyle/>
+          <a:p>
+            <a:pPr algn="l">
+              <a:defRPr sz="1200" b="0" i="1">
+                <a:solidFill>
+                  <a:srgbClr val="2DD4BF"/>
+                </a:solidFill>
+              </a:defRPr>
+            </a:pPr>
+            <a:r>
+              <a:t>Repo, headline numbers, expected questions.</a:t>
+            </a:r>
+          </a:p>
+        </p:txBody>
+      </p:sp>
+      <p:sp>
+        <p:nvSpPr>
+          <p:cNvPr id="7" name="Rectangle 6"/>
+          <p:cNvSpPr/>
+          <p:nvPr/>
+        </p:nvSpPr>
+        <p:spPr>
+          <a:xfrm>
+            <a:off x="0" y="6693408"/>
+            <a:ext cx="12191695" cy="164592"/>
+          </a:xfrm>
+          <a:prstGeom prst="rect">
+            <a:avLst/>
+          </a:prstGeom>
+          <a:solidFill>
+            <a:srgbClr val="12304A"/>
+          </a:solidFill>
+          <a:ln>
+            <a:noFill/>
+          </a:ln>
+        </p:spPr>
+        <p:style>
+          <a:lnRef idx="1">
+            <a:schemeClr val="accent1"/>
+          </a:lnRef>
+          <a:fillRef idx="3">
+            <a:schemeClr val="accent1"/>
+          </a:fillRef>
+          <a:effectRef idx="2">
+            <a:schemeClr val="accent1"/>
+          </a:effectRef>
+          <a:fontRef idx="minor">
+            <a:schemeClr val="lt1"/>
+          </a:fontRef>
+        </p:style>
+        <p:txBody>
+          <a:bodyPr rtlCol="0" anchor="ctr"/>
+          <a:lstStyle/>
+          <a:p>
+            <a:pPr algn="ctr"/>
+          </a:p>
+        </p:txBody>
+      </p:sp>
+      <p:sp>
+        <p:nvSpPr>
+          <p:cNvPr id="8" name="TextBox 7"/>
+          <p:cNvSpPr txBox="1"/>
+          <p:nvPr/>
+        </p:nvSpPr>
+        <p:spPr>
+          <a:xfrm>
+            <a:off x="365760" y="6693408"/>
+            <a:ext cx="8229600" cy="164592"/>
+          </a:xfrm>
+          <a:prstGeom prst="rect">
+            <a:avLst/>
+          </a:prstGeom>
+          <a:noFill/>
+        </p:spPr>
+        <p:txBody>
+          <a:bodyPr wrap="square">
+            <a:spAutoFit/>
+          </a:bodyPr>
+          <a:lstStyle/>
+          <a:p>
+            <a:pPr algn="l">
+              <a:defRPr sz="800" b="0" i="0">
+                <a:solidFill>
+                  <a:srgbClr val="94A3B8"/>
+                </a:solidFill>
+              </a:defRPr>
+            </a:pPr>
+            <a:r>
+              <a:t>Team Hmmmmmmmmmm  ·  Regional Classification  ·  18:30 deadline</a:t>
+            </a:r>
+          </a:p>
+        </p:txBody>
+      </p:sp>
+      <p:sp>
+        <p:nvSpPr>
+          <p:cNvPr id="9" name="TextBox 8"/>
+          <p:cNvSpPr txBox="1"/>
+          <p:nvPr/>
+        </p:nvSpPr>
+        <p:spPr>
+          <a:xfrm>
+            <a:off x="10972800" y="6693408"/>
+            <a:ext cx="1005840" cy="164592"/>
+          </a:xfrm>
+          <a:prstGeom prst="rect">
+            <a:avLst/>
+          </a:prstGeom>
+          <a:noFill/>
+        </p:spPr>
+        <p:txBody>
+          <a:bodyPr wrap="square">
+            <a:spAutoFit/>
+          </a:bodyPr>
+          <a:lstStyle/>
+          <a:p>
+            <a:pPr algn="r">
+              <a:defRPr sz="800" b="0" i="0">
+                <a:solidFill>
+                  <a:srgbClr val="94A3B8"/>
+                </a:solidFill>
+              </a:defRPr>
+            </a:pPr>
+            <a:r>
+              <a:t>10 / 10</a:t>
+            </a:r>
+          </a:p>
+        </p:txBody>
+      </p:sp>
+      <p:sp>
+        <p:nvSpPr>
+          <p:cNvPr id="10" name="Rectangle 9"/>
+          <p:cNvSpPr/>
+          <p:nvPr/>
+        </p:nvSpPr>
+        <p:spPr>
+          <a:xfrm>
+            <a:off x="502920" y="1188720"/>
+            <a:ext cx="11247120" cy="960120"/>
+          </a:xfrm>
+          <a:prstGeom prst="rect">
+            <a:avLst/>
+          </a:prstGeom>
+          <a:solidFill>
+            <a:srgbClr val="12304A"/>
+          </a:solidFill>
+          <a:ln w="12700">
+            <a:solidFill>
+              <a:srgbClr val="2DD4BF"/>
+            </a:solidFill>
+          </a:ln>
+        </p:spPr>
+        <p:style>
+          <a:lnRef idx="1">
+            <a:schemeClr val="accent1"/>
+          </a:lnRef>
+          <a:fillRef idx="3">
+            <a:schemeClr val="accent1"/>
+          </a:fillRef>
+          <a:effectRef idx="2">
+            <a:schemeClr val="accent1"/>
+          </a:effectRef>
+          <a:fontRef idx="minor">
+            <a:schemeClr val="lt1"/>
+          </a:fontRef>
+        </p:style>
+        <p:txBody>
+          <a:bodyPr rtlCol="0" anchor="ctr"/>
+          <a:lstStyle/>
+          <a:p>
+            <a:pPr algn="ctr"/>
+          </a:p>
+        </p:txBody>
+      </p:sp>
+      <p:sp>
+        <p:nvSpPr>
           <p:cNvPr id="11" name="TextBox 10"/>
           <p:cNvSpPr txBox="1"/>
           <p:nvPr/>
         </p:nvSpPr>
         <p:spPr>
           <a:xfrm>
-            <a:off x="1097280" y="1691640"/>
-            <a:ext cx="9875520" cy="274320"/>
-          </a:xfrm>
-          <a:prstGeom prst="rect">
-            <a:avLst/>
-          </a:prstGeom>
-          <a:noFill/>
-        </p:spPr>
-        <p:txBody>
-          <a:bodyPr wrap="square">
-            <a:spAutoFit/>
-          </a:bodyPr>
-          <a:lstStyle/>
-          <a:p>
-            <a:pPr algn="l">
-              <a:defRPr sz="1100" b="1" i="0">
+            <a:off x="640080" y="1280160"/>
+            <a:ext cx="10972800" cy="228600"/>
+          </a:xfrm>
+          <a:prstGeom prst="rect">
+            <a:avLst/>
+          </a:prstGeom>
+          <a:noFill/>
+        </p:spPr>
+        <p:txBody>
+          <a:bodyPr wrap="square">
+            <a:spAutoFit/>
+          </a:bodyPr>
+          <a:lstStyle/>
+          <a:p>
+            <a:pPr algn="l">
+              <a:defRPr sz="1000" b="1" i="0">
                 <a:solidFill>
                   <a:srgbClr val="2DD4BF"/>
                 </a:solidFill>
@@ -4392,22 +5173,22 @@
         </p:nvSpPr>
         <p:spPr>
           <a:xfrm>
-            <a:off x="1097280" y="2011680"/>
-            <a:ext cx="9875520" cy="457200"/>
-          </a:xfrm>
-          <a:prstGeom prst="rect">
-            <a:avLst/>
-          </a:prstGeom>
-          <a:noFill/>
-        </p:spPr>
-        <p:txBody>
-          <a:bodyPr wrap="square">
-            <a:spAutoFit/>
-          </a:bodyPr>
-          <a:lstStyle/>
-          <a:p>
-            <a:pPr algn="l">
-              <a:defRPr sz="2000" b="1" i="0">
+            <a:off x="640080" y="1508760"/>
+            <a:ext cx="10972800" cy="457200"/>
+          </a:xfrm>
+          <a:prstGeom prst="rect">
+            <a:avLst/>
+          </a:prstGeom>
+          <a:noFill/>
+        </p:spPr>
+        <p:txBody>
+          <a:bodyPr wrap="square">
+            <a:spAutoFit/>
+          </a:bodyPr>
+          <a:lstStyle/>
+          <a:p>
+            <a:pPr algn="l">
+              <a:defRPr sz="1800" b="1" i="0">
                 <a:solidFill>
                   <a:srgbClr val="FFFFFF"/>
                 </a:solidFill>
@@ -4427,8 +5208,238 @@
         </p:nvSpPr>
         <p:spPr>
           <a:xfrm>
-            <a:off x="914400" y="2926080"/>
-            <a:ext cx="5029200" cy="1188720"/>
+            <a:off x="502920" y="2331720"/>
+            <a:ext cx="3657600" cy="1005840"/>
+          </a:xfrm>
+          <a:prstGeom prst="rect">
+            <a:avLst/>
+          </a:prstGeom>
+          <a:solidFill>
+            <a:srgbClr val="12304A"/>
+          </a:solidFill>
+          <a:ln w="12700">
+            <a:solidFill>
+              <a:srgbClr val="0D9488"/>
+            </a:solidFill>
+          </a:ln>
+        </p:spPr>
+        <p:style>
+          <a:lnRef idx="1">
+            <a:schemeClr val="accent1"/>
+          </a:lnRef>
+          <a:fillRef idx="3">
+            <a:schemeClr val="accent1"/>
+          </a:fillRef>
+          <a:effectRef idx="2">
+            <a:schemeClr val="accent1"/>
+          </a:effectRef>
+          <a:fontRef idx="minor">
+            <a:schemeClr val="lt1"/>
+          </a:fontRef>
+        </p:style>
+        <p:txBody>
+          <a:bodyPr rtlCol="0" anchor="ctr"/>
+          <a:lstStyle/>
+          <a:p>
+            <a:pPr algn="ctr"/>
+          </a:p>
+        </p:txBody>
+      </p:sp>
+      <p:sp>
+        <p:nvSpPr>
+          <p:cNvPr id="14" name="TextBox 13"/>
+          <p:cNvSpPr txBox="1"/>
+          <p:nvPr/>
+        </p:nvSpPr>
+        <p:spPr>
+          <a:xfrm>
+            <a:off x="502920" y="2423160"/>
+            <a:ext cx="3657600" cy="553212"/>
+          </a:xfrm>
+          <a:prstGeom prst="rect">
+            <a:avLst/>
+          </a:prstGeom>
+          <a:noFill/>
+        </p:spPr>
+        <p:txBody>
+          <a:bodyPr wrap="square">
+            <a:spAutoFit/>
+          </a:bodyPr>
+          <a:lstStyle/>
+          <a:p>
+            <a:pPr algn="ctr">
+              <a:defRPr sz="2200" b="1" i="0">
+                <a:solidFill>
+                  <a:srgbClr val="2DD4BF"/>
+                </a:solidFill>
+              </a:defRPr>
+            </a:pPr>
+            <a:r>
+              <a:t>1.000</a:t>
+            </a:r>
+          </a:p>
+        </p:txBody>
+      </p:sp>
+      <p:sp>
+        <p:nvSpPr>
+          <p:cNvPr id="15" name="TextBox 14"/>
+          <p:cNvSpPr txBox="1"/>
+          <p:nvPr/>
+        </p:nvSpPr>
+        <p:spPr>
+          <a:xfrm>
+            <a:off x="502920" y="2985515"/>
+            <a:ext cx="3657600" cy="321868"/>
+          </a:xfrm>
+          <a:prstGeom prst="rect">
+            <a:avLst/>
+          </a:prstGeom>
+          <a:noFill/>
+        </p:spPr>
+        <p:txBody>
+          <a:bodyPr wrap="square">
+            <a:spAutoFit/>
+          </a:bodyPr>
+          <a:lstStyle/>
+          <a:p>
+            <a:pPr algn="ctr">
+              <a:defRPr sz="1000" b="0" i="0">
+                <a:solidFill>
+                  <a:srgbClr val="94A3B8"/>
+                </a:solidFill>
+              </a:defRPr>
+            </a:pPr>
+            <a:r>
+              <a:t>GEO BASELINE (coords)</a:t>
+            </a:r>
+          </a:p>
+        </p:txBody>
+      </p:sp>
+      <p:sp>
+        <p:nvSpPr>
+          <p:cNvPr id="16" name="Rectangle 15"/>
+          <p:cNvSpPr/>
+          <p:nvPr/>
+        </p:nvSpPr>
+        <p:spPr>
+          <a:xfrm>
+            <a:off x="4297680" y="2331720"/>
+            <a:ext cx="3657600" cy="1005840"/>
+          </a:xfrm>
+          <a:prstGeom prst="rect">
+            <a:avLst/>
+          </a:prstGeom>
+          <a:solidFill>
+            <a:srgbClr val="12304A"/>
+          </a:solidFill>
+          <a:ln w="12700">
+            <a:solidFill>
+              <a:srgbClr val="94A3B8"/>
+            </a:solidFill>
+          </a:ln>
+        </p:spPr>
+        <p:style>
+          <a:lnRef idx="1">
+            <a:schemeClr val="accent1"/>
+          </a:lnRef>
+          <a:fillRef idx="3">
+            <a:schemeClr val="accent1"/>
+          </a:fillRef>
+          <a:effectRef idx="2">
+            <a:schemeClr val="accent1"/>
+          </a:effectRef>
+          <a:fontRef idx="minor">
+            <a:schemeClr val="lt1"/>
+          </a:fontRef>
+        </p:style>
+        <p:txBody>
+          <a:bodyPr rtlCol="0" anchor="ctr"/>
+          <a:lstStyle/>
+          <a:p>
+            <a:pPr algn="ctr"/>
+          </a:p>
+        </p:txBody>
+      </p:sp>
+      <p:sp>
+        <p:nvSpPr>
+          <p:cNvPr id="17" name="TextBox 16"/>
+          <p:cNvSpPr txBox="1"/>
+          <p:nvPr/>
+        </p:nvSpPr>
+        <p:spPr>
+          <a:xfrm>
+            <a:off x="4297680" y="2423160"/>
+            <a:ext cx="3657600" cy="553212"/>
+          </a:xfrm>
+          <a:prstGeom prst="rect">
+            <a:avLst/>
+          </a:prstGeom>
+          <a:noFill/>
+        </p:spPr>
+        <p:txBody>
+          <a:bodyPr wrap="square">
+            <a:spAutoFit/>
+          </a:bodyPr>
+          <a:lstStyle/>
+          <a:p>
+            <a:pPr algn="ctr">
+              <a:defRPr sz="2200" b="1" i="0">
+                <a:solidFill>
+                  <a:srgbClr val="94A3B8"/>
+                </a:solidFill>
+              </a:defRPr>
+            </a:pPr>
+            <a:r>
+              <a:t>0.508</a:t>
+            </a:r>
+          </a:p>
+        </p:txBody>
+      </p:sp>
+      <p:sp>
+        <p:nvSpPr>
+          <p:cNvPr id="18" name="TextBox 17"/>
+          <p:cNvSpPr txBox="1"/>
+          <p:nvPr/>
+        </p:nvSpPr>
+        <p:spPr>
+          <a:xfrm>
+            <a:off x="4297680" y="2985515"/>
+            <a:ext cx="3657600" cy="321868"/>
+          </a:xfrm>
+          <a:prstGeom prst="rect">
+            <a:avLst/>
+          </a:prstGeom>
+          <a:noFill/>
+        </p:spPr>
+        <p:txBody>
+          <a:bodyPr wrap="square">
+            <a:spAutoFit/>
+          </a:bodyPr>
+          <a:lstStyle/>
+          <a:p>
+            <a:pPr algn="ctr">
+              <a:defRPr sz="1000" b="0" i="0">
+                <a:solidFill>
+                  <a:srgbClr val="94A3B8"/>
+                </a:solidFill>
+              </a:defRPr>
+            </a:pPr>
+            <a:r>
+              <a:t>BEHAVIOUR-ONLY (leak-free)</a:t>
+            </a:r>
+          </a:p>
+        </p:txBody>
+      </p:sp>
+      <p:sp>
+        <p:nvSpPr>
+          <p:cNvPr id="19" name="Rectangle 18"/>
+          <p:cNvSpPr/>
+          <p:nvPr/>
+        </p:nvSpPr>
+        <p:spPr>
+          <a:xfrm>
+            <a:off x="8092440" y="2331720"/>
+            <a:ext cx="3657600" cy="1005840"/>
           </a:xfrm>
           <a:prstGeom prst="rect">
             <a:avLst/>
@@ -4466,213 +5477,98 @@
       </p:sp>
       <p:sp>
         <p:nvSpPr>
-          <p:cNvPr id="14" name="TextBox 13"/>
-          <p:cNvSpPr txBox="1"/>
-          <p:nvPr/>
-        </p:nvSpPr>
-        <p:spPr>
-          <a:xfrm>
-            <a:off x="1097280" y="3063240"/>
-            <a:ext cx="4754880" cy="274320"/>
-          </a:xfrm>
-          <a:prstGeom prst="rect">
-            <a:avLst/>
-          </a:prstGeom>
-          <a:noFill/>
-        </p:spPr>
-        <p:txBody>
-          <a:bodyPr wrap="square">
-            <a:spAutoFit/>
-          </a:bodyPr>
-          <a:lstStyle/>
-          <a:p>
-            <a:pPr algn="l">
-              <a:defRPr sz="1100" b="1" i="0">
+          <p:cNvPr id="20" name="TextBox 19"/>
+          <p:cNvSpPr txBox="1"/>
+          <p:nvPr/>
+        </p:nvSpPr>
+        <p:spPr>
+          <a:xfrm>
+            <a:off x="8092440" y="2423160"/>
+            <a:ext cx="3657600" cy="553212"/>
+          </a:xfrm>
+          <a:prstGeom prst="rect">
+            <a:avLst/>
+          </a:prstGeom>
+          <a:noFill/>
+        </p:spPr>
+        <p:txBody>
+          <a:bodyPr wrap="square">
+            <a:spAutoFit/>
+          </a:bodyPr>
+          <a:lstStyle/>
+          <a:p>
+            <a:pPr algn="ctr">
+              <a:defRPr sz="2200" b="1" i="0">
                 <a:solidFill>
                   <a:srgbClr val="FACC15"/>
                 </a:solidFill>
               </a:defRPr>
             </a:pPr>
             <a:r>
-              <a:t>MODEL FILE</a:t>
-            </a:r>
-          </a:p>
-        </p:txBody>
-      </p:sp>
-      <p:sp>
-        <p:nvSpPr>
-          <p:cNvPr id="15" name="TextBox 14"/>
-          <p:cNvSpPr txBox="1"/>
-          <p:nvPr/>
-        </p:nvSpPr>
-        <p:spPr>
-          <a:xfrm>
-            <a:off x="1097280" y="3383280"/>
-            <a:ext cx="4754880" cy="457200"/>
-          </a:xfrm>
-          <a:prstGeom prst="rect">
-            <a:avLst/>
-          </a:prstGeom>
-          <a:noFill/>
-        </p:spPr>
-        <p:txBody>
-          <a:bodyPr wrap="square">
-            <a:spAutoFit/>
-          </a:bodyPr>
-          <a:lstStyle/>
-          <a:p>
-            <a:pPr algn="l">
-              <a:defRPr sz="1400" b="1" i="0">
-                <a:solidFill>
-                  <a:srgbClr val="FFFFFF"/>
-                </a:solidFill>
-              </a:defRPr>
-            </a:pPr>
-            <a:r>
-              <a:t>models/region_classifier_v1.txt</a:t>
-            </a:r>
-          </a:p>
-        </p:txBody>
-      </p:sp>
-      <p:sp>
-        <p:nvSpPr>
-          <p:cNvPr id="16" name="Rectangle 15"/>
-          <p:cNvSpPr/>
-          <p:nvPr/>
-        </p:nvSpPr>
-        <p:spPr>
-          <a:xfrm>
-            <a:off x="6217920" y="2926080"/>
-            <a:ext cx="5029200" cy="1188720"/>
-          </a:xfrm>
-          <a:prstGeom prst="rect">
-            <a:avLst/>
-          </a:prstGeom>
-          <a:solidFill>
-            <a:srgbClr val="12304A"/>
-          </a:solidFill>
-          <a:ln w="12700">
-            <a:solidFill>
-              <a:srgbClr val="FACC15"/>
-            </a:solidFill>
-          </a:ln>
-        </p:spPr>
-        <p:style>
-          <a:lnRef idx="1">
-            <a:schemeClr val="accent1"/>
-          </a:lnRef>
-          <a:fillRef idx="3">
-            <a:schemeClr val="accent1"/>
-          </a:fillRef>
-          <a:effectRef idx="2">
-            <a:schemeClr val="accent1"/>
-          </a:effectRef>
-          <a:fontRef idx="minor">
-            <a:schemeClr val="lt1"/>
-          </a:fontRef>
-        </p:style>
-        <p:txBody>
-          <a:bodyPr rtlCol="0" anchor="ctr"/>
-          <a:lstStyle/>
-          <a:p>
-            <a:pPr algn="ctr"/>
-          </a:p>
-        </p:txBody>
-      </p:sp>
-      <p:sp>
-        <p:nvSpPr>
-          <p:cNvPr id="17" name="TextBox 16"/>
-          <p:cNvSpPr txBox="1"/>
-          <p:nvPr/>
-        </p:nvSpPr>
-        <p:spPr>
-          <a:xfrm>
-            <a:off x="6400800" y="3063240"/>
-            <a:ext cx="4754880" cy="274320"/>
-          </a:xfrm>
-          <a:prstGeom prst="rect">
-            <a:avLst/>
-          </a:prstGeom>
-          <a:noFill/>
-        </p:spPr>
-        <p:txBody>
-          <a:bodyPr wrap="square">
-            <a:spAutoFit/>
-          </a:bodyPr>
-          <a:lstStyle/>
-          <a:p>
-            <a:pPr algn="l">
-              <a:defRPr sz="1100" b="1" i="0">
-                <a:solidFill>
-                  <a:srgbClr val="FACC15"/>
-                </a:solidFill>
-              </a:defRPr>
-            </a:pPr>
-            <a:r>
-              <a:t>GEO AUC  /  BEHAVIOUR AUC</a:t>
-            </a:r>
-          </a:p>
-        </p:txBody>
-      </p:sp>
-      <p:sp>
-        <p:nvSpPr>
-          <p:cNvPr id="18" name="TextBox 17"/>
-          <p:cNvSpPr txBox="1"/>
-          <p:nvPr/>
-        </p:nvSpPr>
-        <p:spPr>
-          <a:xfrm>
-            <a:off x="6400800" y="3383280"/>
-            <a:ext cx="4754880" cy="457200"/>
-          </a:xfrm>
-          <a:prstGeom prst="rect">
-            <a:avLst/>
-          </a:prstGeom>
-          <a:noFill/>
-        </p:spPr>
-        <p:txBody>
-          <a:bodyPr wrap="square">
-            <a:spAutoFit/>
-          </a:bodyPr>
-          <a:lstStyle/>
-          <a:p>
-            <a:pPr algn="l">
-              <a:defRPr sz="2000" b="1" i="0">
-                <a:solidFill>
-                  <a:srgbClr val="FFFFFF"/>
-                </a:solidFill>
-              </a:defRPr>
-            </a:pPr>
-            <a:r>
-              <a:t>1.000  /  0.508</a:t>
-            </a:r>
-          </a:p>
-        </p:txBody>
-      </p:sp>
-      <p:sp>
-        <p:nvSpPr>
-          <p:cNvPr id="19" name="TextBox 18"/>
-          <p:cNvSpPr txBox="1"/>
-          <p:nvPr/>
-        </p:nvSpPr>
-        <p:spPr>
-          <a:xfrm>
-            <a:off x="914400" y="4389120"/>
-            <a:ext cx="10332720" cy="365760"/>
-          </a:xfrm>
-          <a:prstGeom prst="rect">
-            <a:avLst/>
-          </a:prstGeom>
-          <a:noFill/>
-        </p:spPr>
-        <p:txBody>
-          <a:bodyPr wrap="square">
-            <a:spAutoFit/>
-          </a:bodyPr>
-          <a:lstStyle/>
-          <a:p>
-            <a:pPr algn="l">
-              <a:defRPr sz="1400" b="1" i="0">
+              <a:t>0.911</a:t>
+            </a:r>
+          </a:p>
+        </p:txBody>
+      </p:sp>
+      <p:sp>
+        <p:nvSpPr>
+          <p:cNvPr id="21" name="TextBox 20"/>
+          <p:cNvSpPr txBox="1"/>
+          <p:nvPr/>
+        </p:nvSpPr>
+        <p:spPr>
+          <a:xfrm>
+            <a:off x="8092440" y="2985515"/>
+            <a:ext cx="3657600" cy="321868"/>
+          </a:xfrm>
+          <a:prstGeom prst="rect">
+            <a:avLst/>
+          </a:prstGeom>
+          <a:noFill/>
+        </p:spPr>
+        <p:txBody>
+          <a:bodyPr wrap="square">
+            <a:spAutoFit/>
+          </a:bodyPr>
+          <a:lstStyle/>
+          <a:p>
+            <a:pPr algn="ctr">
+              <a:defRPr sz="1000" b="0" i="0">
+                <a:solidFill>
+                  <a:srgbClr val="94A3B8"/>
+                </a:solidFill>
+              </a:defRPr>
+            </a:pPr>
+            <a:r>
+              <a:t>STRUCTURAL (with distance)</a:t>
+            </a:r>
+          </a:p>
+        </p:txBody>
+      </p:sp>
+      <p:sp>
+        <p:nvSpPr>
+          <p:cNvPr id="22" name="TextBox 21"/>
+          <p:cNvSpPr txBox="1"/>
+          <p:nvPr/>
+        </p:nvSpPr>
+        <p:spPr>
+          <a:xfrm>
+            <a:off x="502920" y="3520440"/>
+            <a:ext cx="11247120" cy="320040"/>
+          </a:xfrm>
+          <a:prstGeom prst="rect">
+            <a:avLst/>
+          </a:prstGeom>
+          <a:noFill/>
+        </p:spPr>
+        <p:txBody>
+          <a:bodyPr wrap="square">
+            <a:spAutoFit/>
+          </a:bodyPr>
+          <a:lstStyle/>
+          <a:p>
+            <a:pPr algn="l">
+              <a:defRPr sz="1300" b="1" i="0">
                 <a:solidFill>
                   <a:srgbClr val="2DD4BF"/>
                 </a:solidFill>
@@ -4686,14 +5582,14 @@
       </p:sp>
       <p:sp>
         <p:nvSpPr>
-          <p:cNvPr id="20" name="TextBox 19"/>
-          <p:cNvSpPr txBox="1"/>
-          <p:nvPr/>
-        </p:nvSpPr>
-        <p:spPr>
-          <a:xfrm>
-            <a:off x="914400" y="4800600"/>
-            <a:ext cx="10332720" cy="1645920"/>
+          <p:cNvPr id="23" name="TextBox 22"/>
+          <p:cNvSpPr txBox="1"/>
+          <p:nvPr/>
+        </p:nvSpPr>
+        <p:spPr>
+          <a:xfrm>
+            <a:off x="502920" y="3886200"/>
+            <a:ext cx="11247120" cy="2468880"/>
           </a:xfrm>
           <a:prstGeom prst="rect">
             <a:avLst/>
@@ -4708,70 +5604,116 @@
           <a:p>
             <a:pPr>
               <a:spcAft>
-                <a:spcPts val="600"/>
+                <a:spcPts val="400"/>
               </a:spcAft>
             </a:pPr>
             <a:r>
-              <a:rPr sz="1400" b="1">
-                <a:solidFill>
-                  <a:srgbClr val="2DD4BF"/>
+              <a:rPr sz="1200" b="1">
+                <a:solidFill>
+                  <a:srgbClr val="FACC15"/>
                 </a:solidFill>
               </a:rPr>
               <a:t>●  </a:t>
             </a:r>
             <a:r>
-              <a:rPr sz="1400">
+              <a:rPr sz="1200">
                 <a:solidFill>
                   <a:srgbClr val="FFFFFF"/>
                 </a:solidFill>
               </a:rPr>
-              <a:t>How did we know the city codes were correct? — coord cross-check, all 22 within 45 km of centroid.</a:t>
+              <a:t>Why did you trust the city codes? — Coord cross-check; all 22 cities within 45 km of expected centroid.</a:t>
             </a:r>
           </a:p>
           <a:p>
             <a:pPr>
               <a:spcAft>
-                <a:spcPts val="600"/>
+                <a:spcPts val="400"/>
               </a:spcAft>
             </a:pPr>
             <a:r>
-              <a:rPr sz="1400" b="1">
-                <a:solidFill>
-                  <a:srgbClr val="2DD4BF"/>
+              <a:rPr sz="1200" b="1">
+                <a:solidFill>
+                  <a:srgbClr val="FACC15"/>
                 </a:solidFill>
               </a:rPr>
               <a:t>●  </a:t>
             </a:r>
             <a:r>
-              <a:rPr sz="1400">
+              <a:rPr sz="1200">
                 <a:solidFill>
                   <a:srgbClr val="FFFFFF"/>
                 </a:solidFill>
               </a:rPr>
-              <a:t>Why did Model B get 0.59 if Model B' is 0.51? — Month was a sampling-window proxy for region.</a:t>
+              <a:t>Why drop month? — Feb is 4.3% of South orders but 20.8% of North. Data-collection artifact, not seasonality.</a:t>
             </a:r>
           </a:p>
           <a:p>
             <a:pPr>
               <a:spcAft>
-                <a:spcPts val="600"/>
+                <a:spcPts val="400"/>
               </a:spcAft>
             </a:pPr>
             <a:r>
-              <a:rPr sz="1400" b="1">
-                <a:solidFill>
-                  <a:srgbClr val="2DD4BF"/>
+              <a:rPr sz="1200" b="1">
+                <a:solidFill>
+                  <a:srgbClr val="FACC15"/>
                 </a:solidFill>
               </a:rPr>
               <a:t>●  </a:t>
             </a:r>
             <a:r>
-              <a:rPr sz="1400">
+              <a:rPr sz="1200">
                 <a:solidFill>
                   <a:srgbClr val="FFFFFF"/>
                 </a:solidFill>
               </a:rPr>
-              <a:t>Could there be regional patterns we just couldn't see? — Maybe, but this dataset doesn't carry that signal.</a:t>
+              <a:t>Is distance_km really 'structural', not just geo? — It's an order-level scalar (pickup→drop). KS test shows distribution shape differs; SHAP shows it dominates.</a:t>
+            </a:r>
+          </a:p>
+          <a:p>
+            <a:pPr>
+              <a:spcAft>
+                <a:spcPts val="400"/>
+              </a:spcAft>
+            </a:pPr>
+            <a:r>
+              <a:rPr sz="1200" b="1">
+                <a:solidFill>
+                  <a:srgbClr val="FACC15"/>
+                </a:solidFill>
+              </a:rPr>
+              <a:t>●  </a:t>
+            </a:r>
+            <a:r>
+              <a:rPr sz="1200">
+                <a:solidFill>
+                  <a:srgbClr val="FFFFFF"/>
+                </a:solidFill>
+              </a:rPr>
+              <a:t>Why does GroupKFold fold-4 drop to 0.64? — That held both KOC (Kerala) and HYD (Telangana). South India is internally heterogeneous; 5-way state classifier inside South hits 38% vs 25% random.</a:t>
+            </a:r>
+          </a:p>
+          <a:p>
+            <a:pPr>
+              <a:spcAft>
+                <a:spcPts val="400"/>
+              </a:spcAft>
+            </a:pPr>
+            <a:r>
+              <a:rPr sz="1200" b="1">
+                <a:solidFill>
+                  <a:srgbClr val="FACC15"/>
+                </a:solidFill>
+              </a:rPr>
+              <a:t>●  </a:t>
+            </a:r>
+            <a:r>
+              <a:rPr sz="1200">
+                <a:solidFill>
+                  <a:srgbClr val="FFFFFF"/>
+                </a:solidFill>
+              </a:rPr>
+              <a:t>Could there be patterns we missed? — Possibly, but with 6 stress tests (interactions, CatBoost cross-check, KS shape, dispersion, GroupKFold, South-internal) all aligned, this finding is well-defended.</a:t>
             </a:r>
           </a:p>
         </p:txBody>
@@ -13637,7 +14579,7 @@
               </a:defRPr>
             </a:pPr>
             <a:r>
-              <a:t>The finding</a:t>
+              <a:t>Deep dive  —  the hidden pattern</a:t>
             </a:r>
           </a:p>
         </p:txBody>
@@ -13672,7 +14614,7 @@
               </a:defRPr>
             </a:pPr>
             <a:r>
-              <a:t>What this tells us about how Zomato operates across India.</a:t>
+              <a:t>Six stress tests on the 'no behavioural signal' claim. One survives.</a:t>
             </a:r>
           </a:p>
         </p:txBody>
@@ -13798,8 +14740,823 @@
         </p:nvSpPr>
         <p:spPr>
           <a:xfrm>
-            <a:off x="502920" y="1371600"/>
-            <a:ext cx="11247120" cy="1371600"/>
+            <a:off x="365760" y="1325880"/>
+            <a:ext cx="6400800" cy="4937760"/>
+          </a:xfrm>
+          <a:prstGeom prst="rect">
+            <a:avLst/>
+          </a:prstGeom>
+          <a:solidFill>
+            <a:srgbClr val="12304A"/>
+          </a:solidFill>
+          <a:ln w="12700">
+            <a:solidFill>
+              <a:srgbClr val="0D9488"/>
+            </a:solidFill>
+          </a:ln>
+        </p:spPr>
+        <p:style>
+          <a:lnRef idx="1">
+            <a:schemeClr val="accent1"/>
+          </a:lnRef>
+          <a:fillRef idx="3">
+            <a:schemeClr val="accent1"/>
+          </a:fillRef>
+          <a:effectRef idx="2">
+            <a:schemeClr val="accent1"/>
+          </a:effectRef>
+          <a:fontRef idx="minor">
+            <a:schemeClr val="lt1"/>
+          </a:fontRef>
+        </p:style>
+        <p:txBody>
+          <a:bodyPr rtlCol="0" anchor="ctr"/>
+          <a:lstStyle/>
+          <a:p>
+            <a:pPr algn="ctr"/>
+          </a:p>
+        </p:txBody>
+      </p:sp>
+      <p:sp>
+        <p:nvSpPr>
+          <p:cNvPr id="11" name="TextBox 10"/>
+          <p:cNvSpPr txBox="1"/>
+          <p:nvPr/>
+        </p:nvSpPr>
+        <p:spPr>
+          <a:xfrm>
+            <a:off x="502920" y="1417320"/>
+            <a:ext cx="6126480" cy="274320"/>
+          </a:xfrm>
+          <a:prstGeom prst="rect">
+            <a:avLst/>
+          </a:prstGeom>
+          <a:noFill/>
+        </p:spPr>
+        <p:txBody>
+          <a:bodyPr wrap="square">
+            <a:spAutoFit/>
+          </a:bodyPr>
+          <a:lstStyle/>
+          <a:p>
+            <a:pPr algn="l">
+              <a:defRPr sz="1100" b="1" i="0">
+                <a:solidFill>
+                  <a:srgbClr val="2DD4BF"/>
+                </a:solidFill>
+              </a:defRPr>
+            </a:pPr>
+            <a:r>
+              <a:t>SIX STRESS TESTS  (GroupKFold-by-city ROC-AUC)</a:t>
+            </a:r>
+          </a:p>
+        </p:txBody>
+      </p:sp>
+      <p:sp>
+        <p:nvSpPr>
+          <p:cNvPr id="12" name="TextBox 11"/>
+          <p:cNvSpPr txBox="1"/>
+          <p:nvPr/>
+        </p:nvSpPr>
+        <p:spPr>
+          <a:xfrm>
+            <a:off x="502920" y="1783080"/>
+            <a:ext cx="4114800" cy="274320"/>
+          </a:xfrm>
+          <a:prstGeom prst="rect">
+            <a:avLst/>
+          </a:prstGeom>
+          <a:noFill/>
+        </p:spPr>
+        <p:txBody>
+          <a:bodyPr wrap="square">
+            <a:spAutoFit/>
+          </a:bodyPr>
+          <a:lstStyle/>
+          <a:p>
+            <a:pPr algn="l">
+              <a:defRPr sz="1000" b="1" i="0">
+                <a:solidFill>
+                  <a:srgbClr val="FACC15"/>
+                </a:solidFill>
+              </a:defRPr>
+            </a:pPr>
+            <a:r>
+              <a:t>feature added</a:t>
+            </a:r>
+          </a:p>
+        </p:txBody>
+      </p:sp>
+      <p:sp>
+        <p:nvSpPr>
+          <p:cNvPr id="13" name="TextBox 12"/>
+          <p:cNvSpPr txBox="1"/>
+          <p:nvPr/>
+        </p:nvSpPr>
+        <p:spPr>
+          <a:xfrm>
+            <a:off x="4663440" y="1783080"/>
+            <a:ext cx="914400" cy="274320"/>
+          </a:xfrm>
+          <a:prstGeom prst="rect">
+            <a:avLst/>
+          </a:prstGeom>
+          <a:noFill/>
+        </p:spPr>
+        <p:txBody>
+          <a:bodyPr wrap="square">
+            <a:spAutoFit/>
+          </a:bodyPr>
+          <a:lstStyle/>
+          <a:p>
+            <a:pPr algn="l">
+              <a:defRPr sz="1000" b="1" i="0">
+                <a:solidFill>
+                  <a:srgbClr val="FACC15"/>
+                </a:solidFill>
+              </a:defRPr>
+            </a:pPr>
+            <a:r>
+              <a:t>AUC</a:t>
+            </a:r>
+          </a:p>
+        </p:txBody>
+      </p:sp>
+      <p:sp>
+        <p:nvSpPr>
+          <p:cNvPr id="14" name="TextBox 13"/>
+          <p:cNvSpPr txBox="1"/>
+          <p:nvPr/>
+        </p:nvSpPr>
+        <p:spPr>
+          <a:xfrm>
+            <a:off x="5669280" y="1783080"/>
+            <a:ext cx="1097280" cy="274320"/>
+          </a:xfrm>
+          <a:prstGeom prst="rect">
+            <a:avLst/>
+          </a:prstGeom>
+          <a:noFill/>
+        </p:spPr>
+        <p:txBody>
+          <a:bodyPr wrap="square">
+            <a:spAutoFit/>
+          </a:bodyPr>
+          <a:lstStyle/>
+          <a:p>
+            <a:pPr algn="l">
+              <a:defRPr sz="1000" b="1" i="0">
+                <a:solidFill>
+                  <a:srgbClr val="FACC15"/>
+                </a:solidFill>
+              </a:defRPr>
+            </a:pPr>
+            <a:r>
+              <a:t>verdict</a:t>
+            </a:r>
+          </a:p>
+        </p:txBody>
+      </p:sp>
+      <p:sp>
+        <p:nvSpPr>
+          <p:cNvPr id="15" name="TextBox 14"/>
+          <p:cNvSpPr txBox="1"/>
+          <p:nvPr/>
+        </p:nvSpPr>
+        <p:spPr>
+          <a:xfrm>
+            <a:off x="502920" y="2103120"/>
+            <a:ext cx="4114800" cy="320040"/>
+          </a:xfrm>
+          <a:prstGeom prst="rect">
+            <a:avLst/>
+          </a:prstGeom>
+          <a:noFill/>
+        </p:spPr>
+        <p:txBody>
+          <a:bodyPr wrap="square">
+            <a:spAutoFit/>
+          </a:bodyPr>
+          <a:lstStyle/>
+          <a:p>
+            <a:pPr algn="l">
+              <a:defRPr sz="1100" b="0" i="0">
+                <a:solidFill>
+                  <a:srgbClr val="FFFFFF"/>
+                </a:solidFill>
+              </a:defRPr>
+            </a:pPr>
+            <a:r>
+              <a:t>Behaviour-only (leak-free)</a:t>
+            </a:r>
+          </a:p>
+        </p:txBody>
+      </p:sp>
+      <p:sp>
+        <p:nvSpPr>
+          <p:cNvPr id="16" name="TextBox 15"/>
+          <p:cNvSpPr txBox="1"/>
+          <p:nvPr/>
+        </p:nvSpPr>
+        <p:spPr>
+          <a:xfrm>
+            <a:off x="4663440" y="2103120"/>
+            <a:ext cx="914400" cy="320040"/>
+          </a:xfrm>
+          <a:prstGeom prst="rect">
+            <a:avLst/>
+          </a:prstGeom>
+          <a:noFill/>
+        </p:spPr>
+        <p:txBody>
+          <a:bodyPr wrap="square">
+            <a:spAutoFit/>
+          </a:bodyPr>
+          <a:lstStyle/>
+          <a:p>
+            <a:pPr algn="l">
+              <a:defRPr sz="1100" b="1" i="0">
+                <a:solidFill>
+                  <a:srgbClr val="94A3B8"/>
+                </a:solidFill>
+              </a:defRPr>
+            </a:pPr>
+            <a:r>
+              <a:t>0.508</a:t>
+            </a:r>
+          </a:p>
+        </p:txBody>
+      </p:sp>
+      <p:sp>
+        <p:nvSpPr>
+          <p:cNvPr id="17" name="TextBox 16"/>
+          <p:cNvSpPr txBox="1"/>
+          <p:nvPr/>
+        </p:nvSpPr>
+        <p:spPr>
+          <a:xfrm>
+            <a:off x="5669280" y="2103120"/>
+            <a:ext cx="1097280" cy="320040"/>
+          </a:xfrm>
+          <a:prstGeom prst="rect">
+            <a:avLst/>
+          </a:prstGeom>
+          <a:noFill/>
+        </p:spPr>
+        <p:txBody>
+          <a:bodyPr wrap="square">
+            <a:spAutoFit/>
+          </a:bodyPr>
+          <a:lstStyle/>
+          <a:p>
+            <a:pPr algn="l">
+              <a:defRPr sz="1000" b="0" i="1">
+                <a:solidFill>
+                  <a:srgbClr val="94A3B8"/>
+                </a:solidFill>
+              </a:defRPr>
+            </a:pPr>
+            <a:r>
+              <a:t>random</a:t>
+            </a:r>
+          </a:p>
+        </p:txBody>
+      </p:sp>
+      <p:sp>
+        <p:nvSpPr>
+          <p:cNvPr id="18" name="TextBox 17"/>
+          <p:cNvSpPr txBox="1"/>
+          <p:nvPr/>
+        </p:nvSpPr>
+        <p:spPr>
+          <a:xfrm>
+            <a:off x="502920" y="2487168"/>
+            <a:ext cx="4114800" cy="320040"/>
+          </a:xfrm>
+          <a:prstGeom prst="rect">
+            <a:avLst/>
+          </a:prstGeom>
+          <a:noFill/>
+        </p:spPr>
+        <p:txBody>
+          <a:bodyPr wrap="square">
+            <a:spAutoFit/>
+          </a:bodyPr>
+          <a:lstStyle/>
+          <a:p>
+            <a:pPr algn="l">
+              <a:defRPr sz="1100" b="0" i="0">
+                <a:solidFill>
+                  <a:srgbClr val="FFFFFF"/>
+                </a:solidFill>
+              </a:defRPr>
+            </a:pPr>
+            <a:r>
+              <a:t>+ traffic × hour interaction</a:t>
+            </a:r>
+          </a:p>
+        </p:txBody>
+      </p:sp>
+      <p:sp>
+        <p:nvSpPr>
+          <p:cNvPr id="19" name="TextBox 18"/>
+          <p:cNvSpPr txBox="1"/>
+          <p:nvPr/>
+        </p:nvSpPr>
+        <p:spPr>
+          <a:xfrm>
+            <a:off x="4663440" y="2487168"/>
+            <a:ext cx="914400" cy="320040"/>
+          </a:xfrm>
+          <a:prstGeom prst="rect">
+            <a:avLst/>
+          </a:prstGeom>
+          <a:noFill/>
+        </p:spPr>
+        <p:txBody>
+          <a:bodyPr wrap="square">
+            <a:spAutoFit/>
+          </a:bodyPr>
+          <a:lstStyle/>
+          <a:p>
+            <a:pPr algn="l">
+              <a:defRPr sz="1100" b="1" i="0">
+                <a:solidFill>
+                  <a:srgbClr val="94A3B8"/>
+                </a:solidFill>
+              </a:defRPr>
+            </a:pPr>
+            <a:r>
+              <a:t>0.508</a:t>
+            </a:r>
+          </a:p>
+        </p:txBody>
+      </p:sp>
+      <p:sp>
+        <p:nvSpPr>
+          <p:cNvPr id="20" name="TextBox 19"/>
+          <p:cNvSpPr txBox="1"/>
+          <p:nvPr/>
+        </p:nvSpPr>
+        <p:spPr>
+          <a:xfrm>
+            <a:off x="5669280" y="2487168"/>
+            <a:ext cx="1097280" cy="320040"/>
+          </a:xfrm>
+          <a:prstGeom prst="rect">
+            <a:avLst/>
+          </a:prstGeom>
+          <a:noFill/>
+        </p:spPr>
+        <p:txBody>
+          <a:bodyPr wrap="square">
+            <a:spAutoFit/>
+          </a:bodyPr>
+          <a:lstStyle/>
+          <a:p>
+            <a:pPr algn="l">
+              <a:defRPr sz="1000" b="0" i="1">
+                <a:solidFill>
+                  <a:srgbClr val="94A3B8"/>
+                </a:solidFill>
+              </a:defRPr>
+            </a:pPr>
+            <a:r>
+              <a:t>no lift</a:t>
+            </a:r>
+          </a:p>
+        </p:txBody>
+      </p:sp>
+      <p:sp>
+        <p:nvSpPr>
+          <p:cNvPr id="21" name="TextBox 20"/>
+          <p:cNvSpPr txBox="1"/>
+          <p:nvPr/>
+        </p:nvSpPr>
+        <p:spPr>
+          <a:xfrm>
+            <a:off x="502920" y="2871215"/>
+            <a:ext cx="4114800" cy="320040"/>
+          </a:xfrm>
+          <a:prstGeom prst="rect">
+            <a:avLst/>
+          </a:prstGeom>
+          <a:noFill/>
+        </p:spPr>
+        <p:txBody>
+          <a:bodyPr wrap="square">
+            <a:spAutoFit/>
+          </a:bodyPr>
+          <a:lstStyle/>
+          <a:p>
+            <a:pPr algn="l">
+              <a:defRPr sz="1100" b="0" i="0">
+                <a:solidFill>
+                  <a:srgbClr val="FFFFFF"/>
+                </a:solidFill>
+              </a:defRPr>
+            </a:pPr>
+            <a:r>
+              <a:t>+ weather × traffic interaction</a:t>
+            </a:r>
+          </a:p>
+        </p:txBody>
+      </p:sp>
+      <p:sp>
+        <p:nvSpPr>
+          <p:cNvPr id="22" name="TextBox 21"/>
+          <p:cNvSpPr txBox="1"/>
+          <p:nvPr/>
+        </p:nvSpPr>
+        <p:spPr>
+          <a:xfrm>
+            <a:off x="4663440" y="2871215"/>
+            <a:ext cx="914400" cy="320040"/>
+          </a:xfrm>
+          <a:prstGeom prst="rect">
+            <a:avLst/>
+          </a:prstGeom>
+          <a:noFill/>
+        </p:spPr>
+        <p:txBody>
+          <a:bodyPr wrap="square">
+            <a:spAutoFit/>
+          </a:bodyPr>
+          <a:lstStyle/>
+          <a:p>
+            <a:pPr algn="l">
+              <a:defRPr sz="1100" b="1" i="0">
+                <a:solidFill>
+                  <a:srgbClr val="94A3B8"/>
+                </a:solidFill>
+              </a:defRPr>
+            </a:pPr>
+            <a:r>
+              <a:t>0.502</a:t>
+            </a:r>
+          </a:p>
+        </p:txBody>
+      </p:sp>
+      <p:sp>
+        <p:nvSpPr>
+          <p:cNvPr id="23" name="TextBox 22"/>
+          <p:cNvSpPr txBox="1"/>
+          <p:nvPr/>
+        </p:nvSpPr>
+        <p:spPr>
+          <a:xfrm>
+            <a:off x="5669280" y="2871215"/>
+            <a:ext cx="1097280" cy="320040"/>
+          </a:xfrm>
+          <a:prstGeom prst="rect">
+            <a:avLst/>
+          </a:prstGeom>
+          <a:noFill/>
+        </p:spPr>
+        <p:txBody>
+          <a:bodyPr wrap="square">
+            <a:spAutoFit/>
+          </a:bodyPr>
+          <a:lstStyle/>
+          <a:p>
+            <a:pPr algn="l">
+              <a:defRPr sz="1000" b="0" i="1">
+                <a:solidFill>
+                  <a:srgbClr val="94A3B8"/>
+                </a:solidFill>
+              </a:defRPr>
+            </a:pPr>
+            <a:r>
+              <a:t>no lift</a:t>
+            </a:r>
+          </a:p>
+        </p:txBody>
+      </p:sp>
+      <p:sp>
+        <p:nvSpPr>
+          <p:cNvPr id="24" name="TextBox 23"/>
+          <p:cNvSpPr txBox="1"/>
+          <p:nvPr/>
+        </p:nvSpPr>
+        <p:spPr>
+          <a:xfrm>
+            <a:off x="502920" y="3255263"/>
+            <a:ext cx="4114800" cy="320040"/>
+          </a:xfrm>
+          <a:prstGeom prst="rect">
+            <a:avLst/>
+          </a:prstGeom>
+          <a:noFill/>
+        </p:spPr>
+        <p:txBody>
+          <a:bodyPr wrap="square">
+            <a:spAutoFit/>
+          </a:bodyPr>
+          <a:lstStyle/>
+          <a:p>
+            <a:pPr algn="l">
+              <a:defRPr sz="1100" b="0" i="0">
+                <a:solidFill>
+                  <a:srgbClr val="FFFFFF"/>
+                </a:solidFill>
+              </a:defRPr>
+            </a:pPr>
+            <a:r>
+              <a:t>+ vehicle × multi-delivery interaction</a:t>
+            </a:r>
+          </a:p>
+        </p:txBody>
+      </p:sp>
+      <p:sp>
+        <p:nvSpPr>
+          <p:cNvPr id="25" name="TextBox 24"/>
+          <p:cNvSpPr txBox="1"/>
+          <p:nvPr/>
+        </p:nvSpPr>
+        <p:spPr>
+          <a:xfrm>
+            <a:off x="4663440" y="3255263"/>
+            <a:ext cx="914400" cy="320040"/>
+          </a:xfrm>
+          <a:prstGeom prst="rect">
+            <a:avLst/>
+          </a:prstGeom>
+          <a:noFill/>
+        </p:spPr>
+        <p:txBody>
+          <a:bodyPr wrap="square">
+            <a:spAutoFit/>
+          </a:bodyPr>
+          <a:lstStyle/>
+          <a:p>
+            <a:pPr algn="l">
+              <a:defRPr sz="1100" b="1" i="0">
+                <a:solidFill>
+                  <a:srgbClr val="94A3B8"/>
+                </a:solidFill>
+              </a:defRPr>
+            </a:pPr>
+            <a:r>
+              <a:t>0.504</a:t>
+            </a:r>
+          </a:p>
+        </p:txBody>
+      </p:sp>
+      <p:sp>
+        <p:nvSpPr>
+          <p:cNvPr id="26" name="TextBox 25"/>
+          <p:cNvSpPr txBox="1"/>
+          <p:nvPr/>
+        </p:nvSpPr>
+        <p:spPr>
+          <a:xfrm>
+            <a:off x="5669280" y="3255263"/>
+            <a:ext cx="1097280" cy="320040"/>
+          </a:xfrm>
+          <a:prstGeom prst="rect">
+            <a:avLst/>
+          </a:prstGeom>
+          <a:noFill/>
+        </p:spPr>
+        <p:txBody>
+          <a:bodyPr wrap="square">
+            <a:spAutoFit/>
+          </a:bodyPr>
+          <a:lstStyle/>
+          <a:p>
+            <a:pPr algn="l">
+              <a:defRPr sz="1000" b="0" i="1">
+                <a:solidFill>
+                  <a:srgbClr val="94A3B8"/>
+                </a:solidFill>
+              </a:defRPr>
+            </a:pPr>
+            <a:r>
+              <a:t>no lift</a:t>
+            </a:r>
+          </a:p>
+        </p:txBody>
+      </p:sp>
+      <p:sp>
+        <p:nvSpPr>
+          <p:cNvPr id="27" name="TextBox 26"/>
+          <p:cNvSpPr txBox="1"/>
+          <p:nvPr/>
+        </p:nvSpPr>
+        <p:spPr>
+          <a:xfrm>
+            <a:off x="502920" y="3639311"/>
+            <a:ext cx="4114800" cy="320040"/>
+          </a:xfrm>
+          <a:prstGeom prst="rect">
+            <a:avLst/>
+          </a:prstGeom>
+          <a:noFill/>
+        </p:spPr>
+        <p:txBody>
+          <a:bodyPr wrap="square">
+            <a:spAutoFit/>
+          </a:bodyPr>
+          <a:lstStyle/>
+          <a:p>
+            <a:pPr algn="l">
+              <a:defRPr sz="1100" b="0" i="0">
+                <a:solidFill>
+                  <a:srgbClr val="FFFFFF"/>
+                </a:solidFill>
+              </a:defRPr>
+            </a:pPr>
+            <a:r>
+              <a:t>+ rating × traffic interaction</a:t>
+            </a:r>
+          </a:p>
+        </p:txBody>
+      </p:sp>
+      <p:sp>
+        <p:nvSpPr>
+          <p:cNvPr id="28" name="TextBox 27"/>
+          <p:cNvSpPr txBox="1"/>
+          <p:nvPr/>
+        </p:nvSpPr>
+        <p:spPr>
+          <a:xfrm>
+            <a:off x="4663440" y="3639311"/>
+            <a:ext cx="914400" cy="320040"/>
+          </a:xfrm>
+          <a:prstGeom prst="rect">
+            <a:avLst/>
+          </a:prstGeom>
+          <a:noFill/>
+        </p:spPr>
+        <p:txBody>
+          <a:bodyPr wrap="square">
+            <a:spAutoFit/>
+          </a:bodyPr>
+          <a:lstStyle/>
+          <a:p>
+            <a:pPr algn="l">
+              <a:defRPr sz="1100" b="1" i="0">
+                <a:solidFill>
+                  <a:srgbClr val="94A3B8"/>
+                </a:solidFill>
+              </a:defRPr>
+            </a:pPr>
+            <a:r>
+              <a:t>0.501</a:t>
+            </a:r>
+          </a:p>
+        </p:txBody>
+      </p:sp>
+      <p:sp>
+        <p:nvSpPr>
+          <p:cNvPr id="29" name="TextBox 28"/>
+          <p:cNvSpPr txBox="1"/>
+          <p:nvPr/>
+        </p:nvSpPr>
+        <p:spPr>
+          <a:xfrm>
+            <a:off x="5669280" y="3639311"/>
+            <a:ext cx="1097280" cy="320040"/>
+          </a:xfrm>
+          <a:prstGeom prst="rect">
+            <a:avLst/>
+          </a:prstGeom>
+          <a:noFill/>
+        </p:spPr>
+        <p:txBody>
+          <a:bodyPr wrap="square">
+            <a:spAutoFit/>
+          </a:bodyPr>
+          <a:lstStyle/>
+          <a:p>
+            <a:pPr algn="l">
+              <a:defRPr sz="1000" b="0" i="1">
+                <a:solidFill>
+                  <a:srgbClr val="94A3B8"/>
+                </a:solidFill>
+              </a:defRPr>
+            </a:pPr>
+            <a:r>
+              <a:t>no lift</a:t>
+            </a:r>
+          </a:p>
+        </p:txBody>
+      </p:sp>
+      <p:sp>
+        <p:nvSpPr>
+          <p:cNvPr id="30" name="TextBox 29"/>
+          <p:cNvSpPr txBox="1"/>
+          <p:nvPr/>
+        </p:nvSpPr>
+        <p:spPr>
+          <a:xfrm>
+            <a:off x="502920" y="4023360"/>
+            <a:ext cx="4114800" cy="320040"/>
+          </a:xfrm>
+          <a:prstGeom prst="rect">
+            <a:avLst/>
+          </a:prstGeom>
+          <a:noFill/>
+        </p:spPr>
+        <p:txBody>
+          <a:bodyPr wrap="square">
+            <a:spAutoFit/>
+          </a:bodyPr>
+          <a:lstStyle/>
+          <a:p>
+            <a:pPr algn="l">
+              <a:defRPr sz="1100" b="0" i="0">
+                <a:solidFill>
+                  <a:srgbClr val="FFFFFF"/>
+                </a:solidFill>
+              </a:defRPr>
+            </a:pPr>
+            <a:r>
+              <a:t>+ distance_km  (haversine, derived)</a:t>
+            </a:r>
+          </a:p>
+        </p:txBody>
+      </p:sp>
+      <p:sp>
+        <p:nvSpPr>
+          <p:cNvPr id="31" name="TextBox 30"/>
+          <p:cNvSpPr txBox="1"/>
+          <p:nvPr/>
+        </p:nvSpPr>
+        <p:spPr>
+          <a:xfrm>
+            <a:off x="4663440" y="4023360"/>
+            <a:ext cx="914400" cy="320040"/>
+          </a:xfrm>
+          <a:prstGeom prst="rect">
+            <a:avLst/>
+          </a:prstGeom>
+          <a:noFill/>
+        </p:spPr>
+        <p:txBody>
+          <a:bodyPr wrap="square">
+            <a:spAutoFit/>
+          </a:bodyPr>
+          <a:lstStyle/>
+          <a:p>
+            <a:pPr algn="l">
+              <a:defRPr sz="1100" b="1" i="0">
+                <a:solidFill>
+                  <a:srgbClr val="FACC15"/>
+                </a:solidFill>
+              </a:defRPr>
+            </a:pPr>
+            <a:r>
+              <a:t>0.911</a:t>
+            </a:r>
+          </a:p>
+        </p:txBody>
+      </p:sp>
+      <p:sp>
+        <p:nvSpPr>
+          <p:cNvPr id="32" name="TextBox 31"/>
+          <p:cNvSpPr txBox="1"/>
+          <p:nvPr/>
+        </p:nvSpPr>
+        <p:spPr>
+          <a:xfrm>
+            <a:off x="5669280" y="4023360"/>
+            <a:ext cx="1097280" cy="320040"/>
+          </a:xfrm>
+          <a:prstGeom prst="rect">
+            <a:avLst/>
+          </a:prstGeom>
+          <a:noFill/>
+        </p:spPr>
+        <p:txBody>
+          <a:bodyPr wrap="square">
+            <a:spAutoFit/>
+          </a:bodyPr>
+          <a:lstStyle/>
+          <a:p>
+            <a:pPr algn="l">
+              <a:defRPr sz="1000" b="0" i="1">
+                <a:solidFill>
+                  <a:srgbClr val="FACC15"/>
+                </a:solidFill>
+              </a:defRPr>
+            </a:pPr>
+            <a:r>
+              <a:t>BIG LIFT</a:t>
+            </a:r>
+          </a:p>
+        </p:txBody>
+      </p:sp>
+      <p:sp>
+        <p:nvSpPr>
+          <p:cNvPr id="33" name="Rectangle 32"/>
+          <p:cNvSpPr/>
+          <p:nvPr/>
+        </p:nvSpPr>
+        <p:spPr>
+          <a:xfrm>
+            <a:off x="6903720" y="1325880"/>
+            <a:ext cx="4892040" cy="4937760"/>
           </a:xfrm>
           <a:prstGeom prst="rect">
             <a:avLst/>
@@ -13837,14 +15594,14 @@
       </p:sp>
       <p:sp>
         <p:nvSpPr>
-          <p:cNvPr id="11" name="TextBox 10"/>
-          <p:cNvSpPr txBox="1"/>
-          <p:nvPr/>
-        </p:nvSpPr>
-        <p:spPr>
-          <a:xfrm>
-            <a:off x="640080" y="1444752"/>
-            <a:ext cx="10972800" cy="274320"/>
+          <p:cNvPr id="34" name="TextBox 33"/>
+          <p:cNvSpPr txBox="1"/>
+          <p:nvPr/>
+        </p:nvSpPr>
+        <p:spPr>
+          <a:xfrm>
+            <a:off x="7040880" y="1399032"/>
+            <a:ext cx="4617720" cy="274320"/>
           </a:xfrm>
           <a:prstGeom prst="rect">
             <a:avLst/>
@@ -13865,21 +15622,21 @@
               </a:defRPr>
             </a:pPr>
             <a:r>
-              <a:t>HEADLINE</a:t>
-            </a:r>
-          </a:p>
-        </p:txBody>
-      </p:sp>
-      <p:sp>
-        <p:nvSpPr>
-          <p:cNvPr id="12" name="TextBox 11"/>
-          <p:cNvSpPr txBox="1"/>
-          <p:nvPr/>
-        </p:nvSpPr>
-        <p:spPr>
-          <a:xfrm>
-            <a:off x="640080" y="1737360"/>
-            <a:ext cx="10972800" cy="914400"/>
+              <a:t>THE PATTERN  —  distance_km</a:t>
+            </a:r>
+          </a:p>
+        </p:txBody>
+      </p:sp>
+      <p:sp>
+        <p:nvSpPr>
+          <p:cNvPr id="35" name="TextBox 34"/>
+          <p:cNvSpPr txBox="1"/>
+          <p:nvPr/>
+        </p:nvSpPr>
+        <p:spPr>
+          <a:xfrm>
+            <a:off x="7040880" y="1691640"/>
+            <a:ext cx="4617720" cy="4480560"/>
           </a:xfrm>
           <a:prstGeom prst="rect">
             <a:avLst/>
@@ -13900,145 +15657,17 @@
               </a:defRPr>
             </a:pPr>
             <a:r>
-              <a:t>Once the data-collection sampling artifact is removed, North and South Zomato deliveries are operationally indistinguishable. The ONLY way to tell them apart is to look at where they happen — every other behavioural signal is regional-coincidence noise.</a:t>
-            </a:r>
-          </a:p>
-        </p:txBody>
-      </p:sp>
-      <p:sp>
-        <p:nvSpPr>
-          <p:cNvPr id="13" name="TextBox 12"/>
-          <p:cNvSpPr txBox="1"/>
-          <p:nvPr/>
-        </p:nvSpPr>
-        <p:spPr>
-          <a:xfrm>
-            <a:off x="502920" y="2880360"/>
-            <a:ext cx="11247120" cy="3200400"/>
-          </a:xfrm>
-          <a:prstGeom prst="rect">
-            <a:avLst/>
-          </a:prstGeom>
-          <a:noFill/>
-        </p:spPr>
-        <p:txBody>
-          <a:bodyPr wrap="square">
-            <a:spAutoFit/>
-          </a:bodyPr>
-          <a:lstStyle/>
-          <a:p>
-            <a:pPr>
-              <a:spcAft>
-                <a:spcPts val="600"/>
-              </a:spcAft>
-            </a:pPr>
-            <a:r>
-              <a:rPr sz="1300" b="1">
-                <a:solidFill>
-                  <a:srgbClr val="FACC15"/>
-                </a:solidFill>
-              </a:rPr>
-              <a:t>●  </a:t>
-            </a:r>
-            <a:r>
-              <a:rPr sz="1300">
-                <a:solidFill>
-                  <a:srgbClr val="FFFFFF"/>
-                </a:solidFill>
-              </a:rPr>
-              <a:t>Delivery time, traffic, weather, vehicle, order type, multi-delivery, rider age &amp; rating, festival incidence, time-of-day — 11 univariate tests run, ZERO showed a significant N/S split (all p &gt; 0.05).</a:t>
-            </a:r>
-          </a:p>
-          <a:p>
-            <a:pPr>
-              <a:spcAft>
-                <a:spcPts val="600"/>
-              </a:spcAft>
-            </a:pPr>
-            <a:r>
-              <a:rPr sz="1300" b="1">
-                <a:solidFill>
-                  <a:srgbClr val="FACC15"/>
-                </a:solidFill>
-              </a:rPr>
-              <a:t>●  </a:t>
-            </a:r>
-            <a:r>
-              <a:rPr sz="1300">
-                <a:solidFill>
-                  <a:srgbClr val="FFFFFF"/>
-                </a:solidFill>
-              </a:rPr>
-              <a:t>The behaviour-only model AUC = 0.508 — within Monte Carlo noise of a coin flip.</a:t>
-            </a:r>
-          </a:p>
-          <a:p>
-            <a:pPr>
-              <a:spcAft>
-                <a:spcPts val="600"/>
-              </a:spcAft>
-            </a:pPr>
-            <a:r>
-              <a:rPr sz="1300" b="1">
-                <a:solidFill>
-                  <a:srgbClr val="FACC15"/>
-                </a:solidFill>
-              </a:rPr>
-              <a:t>●  </a:t>
-            </a:r>
-            <a:r>
-              <a:rPr sz="1300">
-                <a:solidFill>
-                  <a:srgbClr val="FFFFFF"/>
-                </a:solidFill>
-              </a:rPr>
-              <a:t>This is a positive result: Zomato runs a remarkably uniform operation across the country. Riders behave the same way, customers order the same way, weather/traffic affects deliveries the same way.</a:t>
-            </a:r>
-          </a:p>
-          <a:p>
-            <a:pPr>
-              <a:spcAft>
-                <a:spcPts val="600"/>
-              </a:spcAft>
-            </a:pPr>
-            <a:r>
-              <a:rPr sz="1300" b="1">
-                <a:solidFill>
-                  <a:srgbClr val="FACC15"/>
-                </a:solidFill>
-              </a:rPr>
-              <a:t>●  </a:t>
-            </a:r>
-            <a:r>
-              <a:rPr sz="1300">
-                <a:solidFill>
-                  <a:srgbClr val="FFFFFF"/>
-                </a:solidFill>
-              </a:rPr>
-              <a:t>Geographic signal (coordinates → AUC 1.000) captures all of the N/S separability — and that's just 'where the city is', not 'how the city behaves'.</a:t>
-            </a:r>
-          </a:p>
-          <a:p>
-            <a:pPr>
-              <a:spcAft>
-                <a:spcPts val="600"/>
-              </a:spcAft>
-            </a:pPr>
-            <a:r>
-              <a:rPr sz="1300" b="1">
-                <a:solidFill>
-                  <a:srgbClr val="FACC15"/>
-                </a:solidFill>
-              </a:rPr>
-              <a:t>●  </a:t>
-            </a:r>
-            <a:r>
-              <a:rPr sz="1300">
-                <a:solidFill>
-                  <a:srgbClr val="FFFFFF"/>
-                </a:solidFill>
-              </a:rPr>
-              <a:t>Honest &gt; vanity (Rulebook §6): we report 'no behavioural difference' rather than over-claiming a 0.59 model that secretly leans on month.</a:t>
+              <a:t>All five hand-engineered interactions add ZERO under GroupKFold. The one feature that does add signal is the haversine distance itself.</a:t>
+            </a:r>
+            <a:br/>
+            <a:br/>
+            <a:r>
+              <a:t>KS test on distance distributions: D = 0.088, p = 6.7×10⁻⁶⁷ — distributions differ in SHAPE even though the medians (9.2 vs 9.0 km) and IQRs are essentially equal.</a:t>
+            </a:r>
+            <a:br/>
+            <a:br/>
+            <a:r>
+              <a:t>Translation: South cities have a structurally different delivery-distance fingerprint from North cities. Not because behaviour differs — but because the urban geometry of restaurants and customers is different.</a:t>
             </a:r>
           </a:p>
         </p:txBody>
